--- a/classes/parte-9-forense-digital-y-respuesta-a-incidentes/214-recuperacion-de-datos-y-file-carving/clase-214-presentacion.pptx
+++ b/classes/parte-9-forense-digital-y-respuesta-a-incidentes/214-recuperacion-de-datos-y-file-carving/clase-214-presentacion.pptx
@@ -17,6 +17,11 @@
     <p:sldId id="265" r:id="rId16"/>
     <p:sldId id="266" r:id="rId17"/>
     <p:sldId id="267" r:id="rId18"/>
+    <p:sldId id="268" r:id="rId19"/>
+    <p:sldId id="269" r:id="rId20"/>
+    <p:sldId id="270" r:id="rId21"/>
+    <p:sldId id="271" r:id="rId22"/>
+    <p:sldId id="272" r:id="rId23"/>
   </p:sldIdLst>
   <p:sldSz cx="9144000" cy="6858000" type="screen4x3"/>
   <p:notesSz cx="6858000" cy="9144000"/>
@@ -3198,7 +3203,7 @@
                   <a:srgbClr val="0B3D2E"/>
                 </a:solidFill>
               </a:rPr>
-              <a:t>⚠️ Errores comunes</a:t>
+              <a:t>🧰 Herramientas y preparación</a:t>
             </a:r>
           </a:p>
         </p:txBody>
@@ -3236,67 +3241,52 @@
                   <a:srgbClr val="22282E"/>
                 </a:solidFill>
               </a:rPr>
-              <a:t>•  Muchos archivos corruptos — Fragmentación; el carving por firmas no la maneja. Prueba PhotoRec con validación.</a:t>
-            </a:r>
-          </a:p>
-          <a:p>
-            <a:pPr>
-              <a:spcAft>
-                <a:spcPts val="600"/>
-              </a:spcAft>
-            </a:pPr>
-            <a:r>
-              <a:rPr sz="1500">
-                <a:solidFill>
-                  <a:srgbClr val="22282E"/>
-                </a:solidFill>
-              </a:rPr>
-              <a:t>•  Falsos positivos abundantes — Firmas genéricas. Valida cada recuperado por su estructura.</a:t>
-            </a:r>
-          </a:p>
-          <a:p>
-            <a:pPr>
-              <a:spcAft>
-                <a:spcPts val="600"/>
-              </a:spcAft>
-            </a:pPr>
-            <a:r>
-              <a:rPr sz="1500">
-                <a:solidFill>
-                  <a:srgbClr val="22282E"/>
-                </a:solidFill>
-              </a:rPr>
-              <a:t>•  No recupera nada — Espacio ya sobrescrito o SSD con TRIM. Busca en otras fuentes.</a:t>
-            </a:r>
-          </a:p>
-          <a:p>
-            <a:pPr>
-              <a:spcAft>
-                <a:spcPts val="600"/>
-              </a:spcAft>
-            </a:pPr>
-            <a:r>
-              <a:rPr sz="1500">
-                <a:solidFill>
-                  <a:srgbClr val="22282E"/>
-                </a:solidFill>
-              </a:rPr>
-              <a:t>•  foremost trunca archivos — Tamaño máximo por defecto. Ajusta la config de tipos.</a:t>
-            </a:r>
-          </a:p>
-          <a:p>
-            <a:pPr>
-              <a:spcAft>
-                <a:spcPts val="600"/>
-              </a:spcAft>
-            </a:pPr>
-            <a:r>
-              <a:rPr sz="1500">
-                <a:solidFill>
-                  <a:srgbClr val="22282E"/>
-                </a:solidFill>
-              </a:rPr>
-              <a:t>•  bulkextractor tarda mucho — Imagen grande. Es normal; corre en background.</a:t>
+              <a:t>•  Carving: photorec, foremost, scalpel.</a:t>
+            </a:r>
+          </a:p>
+          <a:p>
+            <a:pPr>
+              <a:spcAft>
+                <a:spcPts val="600"/>
+              </a:spcAft>
+            </a:pPr>
+            <a:r>
+              <a:rPr sz="1500">
+                <a:solidFill>
+                  <a:srgbClr val="22282E"/>
+                </a:solidFill>
+              </a:rPr>
+              <a:t>•  Triage: bulkextractor.</a:t>
+            </a:r>
+          </a:p>
+          <a:p>
+            <a:pPr>
+              <a:spcAft>
+                <a:spcPts val="600"/>
+              </a:spcAft>
+            </a:pPr>
+            <a:r>
+              <a:rPr sz="1500">
+                <a:solidFill>
+                  <a:srgbClr val="22282E"/>
+                </a:solidFill>
+              </a:rPr>
+              <a:t>•  Metadatos: The Sleuth Kit (icat, fls -d), extundelete (ext4), testdisk (particiones).</a:t>
+            </a:r>
+          </a:p>
+          <a:p>
+            <a:pPr>
+              <a:spcAft>
+                <a:spcPts val="600"/>
+              </a:spcAft>
+            </a:pPr>
+            <a:r>
+              <a:rPr sz="1500">
+                <a:solidFill>
+                  <a:srgbClr val="22282E"/>
+                </a:solidFill>
+              </a:rPr>
+              <a:t>•  Entrada: una imagen .dd propia donde borraste archivos a propósito.</a:t>
             </a:r>
           </a:p>
         </p:txBody>
@@ -3347,7 +3337,7 @@
                   <a:srgbClr val="0B3D2E"/>
                 </a:solidFill>
               </a:rPr>
-              <a:t>❓ Preguntas frecuentes</a:t>
+              <a:t>🧪 Laboratorio guiado</a:t>
             </a:r>
           </a:p>
         </p:txBody>
@@ -3385,97 +3375,97 @@
                   <a:srgbClr val="22282E"/>
                 </a:solidFill>
               </a:rPr>
-              <a:t>•  ❓ ¿Metadatos o carving primero?</a:t>
-            </a:r>
-          </a:p>
-          <a:p>
-            <a:pPr>
-              <a:spcAft>
-                <a:spcPts val="600"/>
-              </a:spcAft>
-            </a:pPr>
-            <a:r>
-              <a:rPr sz="1500">
-                <a:solidFill>
-                  <a:srgbClr val="22282E"/>
-                </a:solidFill>
-              </a:rPr>
-              <a:t>•  Metadatos primero (más fiable y rápido). Carving cuando el FS ya no referencia el archivo.</a:t>
-            </a:r>
-          </a:p>
-          <a:p>
-            <a:pPr>
-              <a:spcAft>
-                <a:spcPts val="600"/>
-              </a:spcAft>
-            </a:pPr>
-            <a:r>
-              <a:rPr sz="1500">
-                <a:solidFill>
-                  <a:srgbClr val="22282E"/>
-                </a:solidFill>
-              </a:rPr>
-              <a:t>•  ❓ ¿Por qué falla el carving con archivos grandes?</a:t>
-            </a:r>
-          </a:p>
-          <a:p>
-            <a:pPr>
-              <a:spcAft>
-                <a:spcPts val="600"/>
-              </a:spcAft>
-            </a:pPr>
-            <a:r>
-              <a:rPr sz="1500">
-                <a:solidFill>
-                  <a:srgbClr val="22282E"/>
-                </a:solidFill>
-              </a:rPr>
-              <a:t>•  Porque suelen estar fragmentados, y el carving por header/footer asume contigüidad.</a:t>
-            </a:r>
-          </a:p>
-          <a:p>
-            <a:pPr>
-              <a:spcAft>
-                <a:spcPts val="600"/>
-              </a:spcAft>
-            </a:pPr>
-            <a:r>
-              <a:rPr sz="1500">
-                <a:solidFill>
-                  <a:srgbClr val="22282E"/>
-                </a:solidFill>
-              </a:rPr>
-              <a:t>•  ❓ ¿Qué recupera bulkextractor?</a:t>
-            </a:r>
-          </a:p>
-          <a:p>
-            <a:pPr>
-              <a:spcAft>
-                <a:spcPts val="600"/>
-              </a:spcAft>
-            </a:pPr>
-            <a:r>
-              <a:rPr sz="1500">
-                <a:solidFill>
-                  <a:srgbClr val="22282E"/>
-                </a:solidFill>
-              </a:rPr>
-              <a:t>•  Artefactos como emails, URLs, números de tarjeta y dominios, sin necesidad de parsear el sistema de archivos. Ideal para triage.</a:t>
-            </a:r>
-          </a:p>
-          <a:p>
-            <a:pPr>
-              <a:spcAft>
-                <a:spcPts val="600"/>
-              </a:spcAft>
-            </a:pPr>
-            <a:r>
-              <a:rPr sz="1500">
-                <a:solidFill>
-                  <a:srgbClr val="22282E"/>
-                </a:solidFill>
-              </a:rPr>
-              <a:t>•  ❓ ¿Cómo sé si un recuperado es válido?</a:t>
+              <a:t>•  Primero intenta recuperación por metadatos con TSK:</a:t>
+            </a:r>
+          </a:p>
+          <a:p>
+            <a:pPr>
+              <a:spcAft>
+                <a:spcPts val="600"/>
+              </a:spcAft>
+            </a:pPr>
+            <a:r>
+              <a:rPr sz="1500">
+                <a:solidFill>
+                  <a:srgbClr val="22282E"/>
+                </a:solidFill>
+              </a:rPr>
+              <a:t>•  Si no hay metadatos, aplica carving con foremost:</a:t>
+            </a:r>
+          </a:p>
+          <a:p>
+            <a:pPr>
+              <a:spcAft>
+                <a:spcPts val="600"/>
+              </a:spcAft>
+            </a:pPr>
+            <a:r>
+              <a:rPr sz="1500">
+                <a:solidFill>
+                  <a:srgbClr val="22282E"/>
+                </a:solidFill>
+              </a:rPr>
+              <a:t>•  Prueba PhotoRec (interactivo, muy potente para imágenes):</a:t>
+            </a:r>
+          </a:p>
+          <a:p>
+            <a:pPr>
+              <a:spcAft>
+                <a:spcPts val="600"/>
+              </a:spcAft>
+            </a:pPr>
+            <a:r>
+              <a:rPr sz="1500">
+                <a:solidFill>
+                  <a:srgbClr val="22282E"/>
+                </a:solidFill>
+              </a:rPr>
+              <a:t>•  Usa Scalpel con su archivo de configuración de firmas:</a:t>
+            </a:r>
+          </a:p>
+          <a:p>
+            <a:pPr>
+              <a:spcAft>
+                <a:spcPts val="600"/>
+              </a:spcAft>
+            </a:pPr>
+            <a:r>
+              <a:rPr sz="1500">
+                <a:solidFill>
+                  <a:srgbClr val="22282E"/>
+                </a:solidFill>
+              </a:rPr>
+              <a:t>•  Ejecuta bulkextractor para triage rápido:</a:t>
+            </a:r>
+          </a:p>
+          <a:p>
+            <a:pPr>
+              <a:spcAft>
+                <a:spcPts val="600"/>
+              </a:spcAft>
+            </a:pPr>
+            <a:r>
+              <a:rPr sz="1500">
+                <a:solidFill>
+                  <a:srgbClr val="22282E"/>
+                </a:solidFill>
+              </a:rPr>
+              <a:t>•  Revisa email.txt, url.txt, ccn.txt.</a:t>
+            </a:r>
+          </a:p>
+          <a:p>
+            <a:pPr>
+              <a:spcAft>
+                <a:spcPts val="600"/>
+              </a:spcAft>
+            </a:pPr>
+            <a:r>
+              <a:rPr sz="1500">
+                <a:solidFill>
+                  <a:srgbClr val="22282E"/>
+                </a:solidFill>
+              </a:rPr>
+              <a:t>•  Valida cada archivo recuperado: ábrelo, verifica su firma y compara su hash con el original que borraste. Descarta falsos positivos.</a:t>
             </a:r>
           </a:p>
         </p:txBody>
@@ -3526,7 +3516,7 @@
                   <a:srgbClr val="0B3D2E"/>
                 </a:solidFill>
               </a:rPr>
-              <a:t>🔗 Referencias</a:t>
+              <a:t>✍️ Ejercicios</a:t>
             </a:r>
           </a:p>
         </p:txBody>
@@ -3564,56 +3554,757 @@
                   <a:srgbClr val="22282E"/>
                 </a:solidFill>
               </a:rPr>
-              <a:t>•  Carrier, B. — File System Forensic Analysis, Addison-Wesley 2005.</a:t>
-            </a:r>
-          </a:p>
-          <a:p>
-            <a:pPr>
-              <a:spcAft>
-                <a:spcPts val="600"/>
-              </a:spcAft>
-            </a:pPr>
-            <a:r>
-              <a:rPr sz="1500">
-                <a:solidFill>
-                  <a:srgbClr val="22282E"/>
-                </a:solidFill>
-              </a:rPr>
-              <a:t>•  PhotoRec / TestDisk: &lt;https://www.cgsecurity.org/wiki/PhotoRec&gt;</a:t>
-            </a:r>
-          </a:p>
-          <a:p>
-            <a:pPr>
-              <a:spcAft>
-                <a:spcPts val="600"/>
-              </a:spcAft>
-            </a:pPr>
-            <a:r>
-              <a:rPr sz="1500">
-                <a:solidFill>
-                  <a:srgbClr val="22282E"/>
-                </a:solidFill>
-              </a:rPr>
-              <a:t>•  foremost / Scalpel: &lt;https://foremost.sourceforge.net/&gt;</a:t>
-            </a:r>
-          </a:p>
-          <a:p>
-            <a:pPr>
-              <a:spcAft>
-                <a:spcPts val="600"/>
-              </a:spcAft>
-            </a:pPr>
-            <a:r>
-              <a:rPr sz="1500">
-                <a:solidFill>
-                  <a:srgbClr val="22282E"/>
-                </a:solidFill>
-              </a:rPr>
-              <a:t>•  bulkextractor: &lt;https://github.com/simsong/bulkextractor&gt;</a:t>
-            </a:r>
-          </a:p>
-        </p:txBody>
-      </p:sp>
+              <a:t>•  Explica cuándo prefieres metadatos y cuándo carving.</a:t>
+            </a:r>
+          </a:p>
+          <a:p>
+            <a:pPr>
+              <a:spcAft>
+                <a:spcPts val="600"/>
+              </a:spcAft>
+            </a:pPr>
+            <a:r>
+              <a:rPr sz="1500">
+                <a:solidFill>
+                  <a:srgbClr val="22282E"/>
+                </a:solidFill>
+              </a:rPr>
+              <a:t>•  Identifica las firmas de JPEG, PDF y ZIP en un editor hex.</a:t>
+            </a:r>
+          </a:p>
+          <a:p>
+            <a:pPr>
+              <a:spcAft>
+                <a:spcPts val="600"/>
+              </a:spcAft>
+            </a:pPr>
+            <a:r>
+              <a:rPr sz="1500">
+                <a:solidFill>
+                  <a:srgbClr val="22282E"/>
+                </a:solidFill>
+              </a:rPr>
+              <a:t>•  Recupera imágenes borradas propias con PhotoRec y valídalas.</a:t>
+            </a:r>
+          </a:p>
+          <a:p>
+            <a:pPr>
+              <a:spcAft>
+                <a:spcPts val="600"/>
+              </a:spcAft>
+            </a:pPr>
+            <a:r>
+              <a:rPr sz="1500">
+                <a:solidFill>
+                  <a:srgbClr val="22282E"/>
+                </a:solidFill>
+              </a:rPr>
+              <a:t>•  Compara los resultados de foremost y Scalpel sobre la misma imagen.</a:t>
+            </a:r>
+          </a:p>
+          <a:p>
+            <a:pPr>
+              <a:spcAft>
+                <a:spcPts val="600"/>
+              </a:spcAft>
+            </a:pPr>
+            <a:r>
+              <a:rPr sz="1500">
+                <a:solidFill>
+                  <a:srgbClr val="22282E"/>
+                </a:solidFill>
+              </a:rPr>
+              <a:t>•  Extrae correos y URLs con bulkextractor.</a:t>
+            </a:r>
+          </a:p>
+          <a:p>
+            <a:pPr>
+              <a:spcAft>
+                <a:spcPts val="600"/>
+              </a:spcAft>
+            </a:pPr>
+            <a:r>
+              <a:rPr sz="1500">
+                <a:solidFill>
+                  <a:srgbClr val="22282E"/>
+                </a:solidFill>
+              </a:rPr>
+              <a:t>•  Explica por qué la fragmentación arruina el carving simple.</a:t>
+            </a:r>
+          </a:p>
+        </p:txBody>
+      </p:sp>
+    </p:spTree>
+  </p:cSld>
+  <p:clrMapOvr>
+    <a:masterClrMapping/>
+  </p:clrMapOvr>
+</p:sld>
+</file>
+
+<file path=ppt/slides/slide13.xml><?xml version="1.0" encoding="utf-8"?>
+<p:sld xmlns:a="http://schemas.openxmlformats.org/drawingml/2006/main" xmlns:p="http://schemas.openxmlformats.org/presentationml/2006/main" xmlns:r="http://schemas.openxmlformats.org/officeDocument/2006/relationships">
+  <p:cSld>
+    <p:spTree>
+      <p:nvGrpSpPr>
+        <p:cNvPr id="1" name=""/>
+        <p:cNvGrpSpPr/>
+        <p:nvPr/>
+      </p:nvGrpSpPr>
+      <p:grpSpPr/>
+      <p:sp>
+        <p:nvSpPr>
+          <p:cNvPr id="2" name="TextBox 1"/>
+          <p:cNvSpPr txBox="1"/>
+          <p:nvPr/>
+        </p:nvSpPr>
+        <p:spPr>
+          <a:xfrm>
+            <a:off x="457200" y="320040"/>
+            <a:ext cx="8229600" cy="822960"/>
+          </a:xfrm>
+          <a:prstGeom prst="rect">
+            <a:avLst/>
+          </a:prstGeom>
+          <a:noFill/>
+        </p:spPr>
+        <p:txBody>
+          <a:bodyPr wrap="square">
+            <a:spAutoFit/>
+          </a:bodyPr>
+          <a:lstStyle/>
+          <a:p>
+            <a:r>
+              <a:rPr sz="2600" b="1">
+                <a:solidFill>
+                  <a:srgbClr val="0B3D2E"/>
+                </a:solidFill>
+              </a:rPr>
+              <a:t>📝 Reto verificable</a:t>
+            </a:r>
+          </a:p>
+        </p:txBody>
+      </p:sp>
+      <p:sp>
+        <p:nvSpPr>
+          <p:cNvPr id="3" name="TextBox 2"/>
+          <p:cNvSpPr txBox="1"/>
+          <p:nvPr/>
+        </p:nvSpPr>
+        <p:spPr>
+          <a:xfrm>
+            <a:off x="457200" y="1280160"/>
+            <a:ext cx="8229600" cy="4937760"/>
+          </a:xfrm>
+          <a:prstGeom prst="rect">
+            <a:avLst/>
+          </a:prstGeom>
+          <a:noFill/>
+        </p:spPr>
+        <p:txBody>
+          <a:bodyPr wrap="square">
+            <a:spAutoFit/>
+          </a:bodyPr>
+          <a:lstStyle/>
+          <a:p>
+            <a:pPr>
+              <a:spcAft>
+                <a:spcPts val="600"/>
+              </a:spcAft>
+            </a:pPr>
+            <a:r>
+              <a:rPr sz="1500">
+                <a:solidFill>
+                  <a:srgbClr val="22282E"/>
+                </a:solidFill>
+              </a:rPr>
+              <a:t>•  Borra cinco archivos conocidos (de tipos distintos) de una imagen propia, recupéralos por carving y demuestra —comparando hashes— cuáles se recuperaron íntegros y cuáles no, explicando la causa.</a:t>
+            </a:r>
+          </a:p>
+          <a:p>
+            <a:pPr>
+              <a:spcAft>
+                <a:spcPts val="600"/>
+              </a:spcAft>
+            </a:pPr>
+            <a:r>
+              <a:rPr sz="1500">
+                <a:solidFill>
+                  <a:srgbClr val="22282E"/>
+                </a:solidFill>
+              </a:rPr>
+              <a:t>•  Criterio de aceptación: entregas los archivos recuperados, una tabla con hash, offset, método y resultado de validación por cada uno; si existe un original de referencia, comparas hashes, y si no…</a:t>
+            </a:r>
+          </a:p>
+        </p:txBody>
+      </p:sp>
+    </p:spTree>
+  </p:cSld>
+  <p:clrMapOvr>
+    <a:masterClrMapping/>
+  </p:clrMapOvr>
+</p:sld>
+</file>
+
+<file path=ppt/slides/slide14.xml><?xml version="1.0" encoding="utf-8"?>
+<p:sld xmlns:a="http://schemas.openxmlformats.org/drawingml/2006/main" xmlns:p="http://schemas.openxmlformats.org/presentationml/2006/main" xmlns:r="http://schemas.openxmlformats.org/officeDocument/2006/relationships">
+  <p:cSld>
+    <p:spTree>
+      <p:nvGrpSpPr>
+        <p:cNvPr id="1" name=""/>
+        <p:cNvGrpSpPr/>
+        <p:nvPr/>
+      </p:nvGrpSpPr>
+      <p:grpSpPr/>
+      <p:sp>
+        <p:nvSpPr>
+          <p:cNvPr id="2" name="TextBox 1"/>
+          <p:cNvSpPr txBox="1"/>
+          <p:nvPr/>
+        </p:nvSpPr>
+        <p:spPr>
+          <a:xfrm>
+            <a:off x="457200" y="320040"/>
+            <a:ext cx="8229600" cy="822960"/>
+          </a:xfrm>
+          <a:prstGeom prst="rect">
+            <a:avLst/>
+          </a:prstGeom>
+          <a:noFill/>
+        </p:spPr>
+        <p:txBody>
+          <a:bodyPr wrap="square">
+            <a:spAutoFit/>
+          </a:bodyPr>
+          <a:lstStyle/>
+          <a:p>
+            <a:r>
+              <a:rPr sz="2600" b="1">
+                <a:solidFill>
+                  <a:srgbClr val="0B3D2E"/>
+                </a:solidFill>
+              </a:rPr>
+              <a:t>⚠️ Errores comunes</a:t>
+            </a:r>
+          </a:p>
+        </p:txBody>
+      </p:sp>
+      <p:sp>
+        <p:nvSpPr>
+          <p:cNvPr id="3" name="TextBox 2"/>
+          <p:cNvSpPr txBox="1"/>
+          <p:nvPr/>
+        </p:nvSpPr>
+        <p:spPr>
+          <a:xfrm>
+            <a:off x="457200" y="1280160"/>
+            <a:ext cx="8229600" cy="4937760"/>
+          </a:xfrm>
+          <a:prstGeom prst="rect">
+            <a:avLst/>
+          </a:prstGeom>
+          <a:noFill/>
+        </p:spPr>
+        <p:txBody>
+          <a:bodyPr wrap="square">
+            <a:spAutoFit/>
+          </a:bodyPr>
+          <a:lstStyle/>
+          <a:p>
+            <a:pPr>
+              <a:spcAft>
+                <a:spcPts val="600"/>
+              </a:spcAft>
+            </a:pPr>
+            <a:r>
+              <a:rPr sz="1500">
+                <a:solidFill>
+                  <a:srgbClr val="22282E"/>
+                </a:solidFill>
+              </a:rPr>
+              <a:t>•  Muchos archivos corruptos — Fragmentación; el carving por firmas no la maneja. Prueba PhotoRec con validación.</a:t>
+            </a:r>
+          </a:p>
+          <a:p>
+            <a:pPr>
+              <a:spcAft>
+                <a:spcPts val="600"/>
+              </a:spcAft>
+            </a:pPr>
+            <a:r>
+              <a:rPr sz="1500">
+                <a:solidFill>
+                  <a:srgbClr val="22282E"/>
+                </a:solidFill>
+              </a:rPr>
+              <a:t>•  Falsos positivos abundantes — Firmas genéricas. Valida cada recuperado por su estructura.</a:t>
+            </a:r>
+          </a:p>
+          <a:p>
+            <a:pPr>
+              <a:spcAft>
+                <a:spcPts val="600"/>
+              </a:spcAft>
+            </a:pPr>
+            <a:r>
+              <a:rPr sz="1500">
+                <a:solidFill>
+                  <a:srgbClr val="22282E"/>
+                </a:solidFill>
+              </a:rPr>
+              <a:t>•  No recupera nada — Espacio ya sobrescrito o SSD con TRIM. Busca en otras fuentes.</a:t>
+            </a:r>
+          </a:p>
+          <a:p>
+            <a:pPr>
+              <a:spcAft>
+                <a:spcPts val="600"/>
+              </a:spcAft>
+            </a:pPr>
+            <a:r>
+              <a:rPr sz="1500">
+                <a:solidFill>
+                  <a:srgbClr val="22282E"/>
+                </a:solidFill>
+              </a:rPr>
+              <a:t>•  foremost trunca archivos — Tamaño máximo por defecto. Ajusta la config de tipos.</a:t>
+            </a:r>
+          </a:p>
+          <a:p>
+            <a:pPr>
+              <a:spcAft>
+                <a:spcPts val="600"/>
+              </a:spcAft>
+            </a:pPr>
+            <a:r>
+              <a:rPr sz="1500">
+                <a:solidFill>
+                  <a:srgbClr val="22282E"/>
+                </a:solidFill>
+              </a:rPr>
+              <a:t>•  bulkextractor tarda mucho — Imagen grande. Es normal; corre en background.</a:t>
+            </a:r>
+          </a:p>
+        </p:txBody>
+      </p:sp>
+    </p:spTree>
+  </p:cSld>
+  <p:clrMapOvr>
+    <a:masterClrMapping/>
+  </p:clrMapOvr>
+</p:sld>
+</file>
+
+<file path=ppt/slides/slide15.xml><?xml version="1.0" encoding="utf-8"?>
+<p:sld xmlns:a="http://schemas.openxmlformats.org/drawingml/2006/main" xmlns:p="http://schemas.openxmlformats.org/presentationml/2006/main" xmlns:r="http://schemas.openxmlformats.org/officeDocument/2006/relationships">
+  <p:cSld>
+    <p:spTree>
+      <p:nvGrpSpPr>
+        <p:cNvPr id="1" name=""/>
+        <p:cNvGrpSpPr/>
+        <p:nvPr/>
+      </p:nvGrpSpPr>
+      <p:grpSpPr/>
+      <p:sp>
+        <p:nvSpPr>
+          <p:cNvPr id="2" name="TextBox 1"/>
+          <p:cNvSpPr txBox="1"/>
+          <p:nvPr/>
+        </p:nvSpPr>
+        <p:spPr>
+          <a:xfrm>
+            <a:off x="457200" y="320040"/>
+            <a:ext cx="8229600" cy="822960"/>
+          </a:xfrm>
+          <a:prstGeom prst="rect">
+            <a:avLst/>
+          </a:prstGeom>
+          <a:noFill/>
+        </p:spPr>
+        <p:txBody>
+          <a:bodyPr wrap="square">
+            <a:spAutoFit/>
+          </a:bodyPr>
+          <a:lstStyle/>
+          <a:p>
+            <a:r>
+              <a:rPr sz="2600" b="1">
+                <a:solidFill>
+                  <a:srgbClr val="0B3D2E"/>
+                </a:solidFill>
+              </a:rPr>
+              <a:t>❓ Preguntas frecuentes</a:t>
+            </a:r>
+          </a:p>
+        </p:txBody>
+      </p:sp>
+      <p:sp>
+        <p:nvSpPr>
+          <p:cNvPr id="3" name="TextBox 2"/>
+          <p:cNvSpPr txBox="1"/>
+          <p:nvPr/>
+        </p:nvSpPr>
+        <p:spPr>
+          <a:xfrm>
+            <a:off x="457200" y="1280160"/>
+            <a:ext cx="8229600" cy="4937760"/>
+          </a:xfrm>
+          <a:prstGeom prst="rect">
+            <a:avLst/>
+          </a:prstGeom>
+          <a:noFill/>
+        </p:spPr>
+        <p:txBody>
+          <a:bodyPr wrap="square">
+            <a:spAutoFit/>
+          </a:bodyPr>
+          <a:lstStyle/>
+          <a:p>
+            <a:pPr>
+              <a:spcAft>
+                <a:spcPts val="600"/>
+              </a:spcAft>
+            </a:pPr>
+            <a:r>
+              <a:rPr sz="1500">
+                <a:solidFill>
+                  <a:srgbClr val="22282E"/>
+                </a:solidFill>
+              </a:rPr>
+              <a:t>•  ❓ ¿Metadatos o carving primero?</a:t>
+            </a:r>
+          </a:p>
+          <a:p>
+            <a:pPr>
+              <a:spcAft>
+                <a:spcPts val="600"/>
+              </a:spcAft>
+            </a:pPr>
+            <a:r>
+              <a:rPr sz="1500">
+                <a:solidFill>
+                  <a:srgbClr val="22282E"/>
+                </a:solidFill>
+              </a:rPr>
+              <a:t>•  Metadatos primero (más fiable y rápido). Carving cuando el FS ya no referencia el archivo.</a:t>
+            </a:r>
+          </a:p>
+          <a:p>
+            <a:pPr>
+              <a:spcAft>
+                <a:spcPts val="600"/>
+              </a:spcAft>
+            </a:pPr>
+            <a:r>
+              <a:rPr sz="1500">
+                <a:solidFill>
+                  <a:srgbClr val="22282E"/>
+                </a:solidFill>
+              </a:rPr>
+              <a:t>•  ❓ ¿Por qué falla el carving con archivos grandes?</a:t>
+            </a:r>
+          </a:p>
+          <a:p>
+            <a:pPr>
+              <a:spcAft>
+                <a:spcPts val="600"/>
+              </a:spcAft>
+            </a:pPr>
+            <a:r>
+              <a:rPr sz="1500">
+                <a:solidFill>
+                  <a:srgbClr val="22282E"/>
+                </a:solidFill>
+              </a:rPr>
+              <a:t>•  Porque suelen estar fragmentados, y el carving por header/footer asume contigüidad.</a:t>
+            </a:r>
+          </a:p>
+          <a:p>
+            <a:pPr>
+              <a:spcAft>
+                <a:spcPts val="600"/>
+              </a:spcAft>
+            </a:pPr>
+            <a:r>
+              <a:rPr sz="1500">
+                <a:solidFill>
+                  <a:srgbClr val="22282E"/>
+                </a:solidFill>
+              </a:rPr>
+              <a:t>•  ❓ ¿Qué recupera bulkextractor?</a:t>
+            </a:r>
+          </a:p>
+          <a:p>
+            <a:pPr>
+              <a:spcAft>
+                <a:spcPts val="600"/>
+              </a:spcAft>
+            </a:pPr>
+            <a:r>
+              <a:rPr sz="1500">
+                <a:solidFill>
+                  <a:srgbClr val="22282E"/>
+                </a:solidFill>
+              </a:rPr>
+              <a:t>•  Artefactos como emails, URLs, números de tarjeta y dominios, sin necesidad de parsear el sistema de archivos. Ideal para triage.</a:t>
+            </a:r>
+          </a:p>
+          <a:p>
+            <a:pPr>
+              <a:spcAft>
+                <a:spcPts val="600"/>
+              </a:spcAft>
+            </a:pPr>
+            <a:r>
+              <a:rPr sz="1500">
+                <a:solidFill>
+                  <a:srgbClr val="22282E"/>
+                </a:solidFill>
+              </a:rPr>
+              <a:t>•  ❓ ¿Cómo sé si un recuperado es válido?</a:t>
+            </a:r>
+          </a:p>
+        </p:txBody>
+      </p:sp>
+    </p:spTree>
+  </p:cSld>
+  <p:clrMapOvr>
+    <a:masterClrMapping/>
+  </p:clrMapOvr>
+</p:sld>
+</file>
+
+<file path=ppt/slides/slide16.xml><?xml version="1.0" encoding="utf-8"?>
+<p:sld xmlns:a="http://schemas.openxmlformats.org/drawingml/2006/main" xmlns:p="http://schemas.openxmlformats.org/presentationml/2006/main" xmlns:r="http://schemas.openxmlformats.org/officeDocument/2006/relationships">
+  <p:cSld>
+    <p:spTree>
+      <p:nvGrpSpPr>
+        <p:cNvPr id="1" name=""/>
+        <p:cNvGrpSpPr/>
+        <p:nvPr/>
+      </p:nvGrpSpPr>
+      <p:grpSpPr/>
+      <p:sp>
+        <p:nvSpPr>
+          <p:cNvPr id="2" name="TextBox 1"/>
+          <p:cNvSpPr txBox="1"/>
+          <p:nvPr/>
+        </p:nvSpPr>
+        <p:spPr>
+          <a:xfrm>
+            <a:off x="457200" y="320040"/>
+            <a:ext cx="8229600" cy="822960"/>
+          </a:xfrm>
+          <a:prstGeom prst="rect">
+            <a:avLst/>
+          </a:prstGeom>
+          <a:noFill/>
+        </p:spPr>
+        <p:txBody>
+          <a:bodyPr wrap="square">
+            <a:spAutoFit/>
+          </a:bodyPr>
+          <a:lstStyle/>
+          <a:p>
+            <a:r>
+              <a:rPr sz="2600" b="1">
+                <a:solidFill>
+                  <a:srgbClr val="0B3D2E"/>
+                </a:solidFill>
+              </a:rPr>
+              <a:t>🔗 Referencias verificables y alcance</a:t>
+            </a:r>
+          </a:p>
+        </p:txBody>
+      </p:sp>
+      <p:sp>
+        <p:nvSpPr>
+          <p:cNvPr id="3" name="TextBox 2"/>
+          <p:cNvSpPr txBox="1"/>
+          <p:nvPr/>
+        </p:nvSpPr>
+        <p:spPr>
+          <a:xfrm>
+            <a:off x="457200" y="1280160"/>
+            <a:ext cx="8229600" cy="4937760"/>
+          </a:xfrm>
+          <a:prstGeom prst="rect">
+            <a:avLst/>
+          </a:prstGeom>
+          <a:noFill/>
+        </p:spPr>
+        <p:txBody>
+          <a:bodyPr wrap="square">
+            <a:spAutoFit/>
+          </a:bodyPr>
+          <a:lstStyle/>
+          <a:p>
+            <a:pPr>
+              <a:spcAft>
+                <a:spcPts val="600"/>
+              </a:spcAft>
+            </a:pPr>
+            <a:r>
+              <a:rPr sz="1500">
+                <a:solidFill>
+                  <a:srgbClr val="22282E"/>
+                </a:solidFill>
+              </a:rPr>
+              <a:t>•  The Sleuth Kit documentation: &lt;https://www.sleuthkit.org/sleuthkit/docs.php&gt; — referencia del proyecto para análisis de filesystem y unidades no asignadas.</a:t>
+            </a:r>
+          </a:p>
+          <a:p>
+            <a:pPr>
+              <a:spcAft>
+                <a:spcPts val="600"/>
+              </a:spcAft>
+            </a:pPr>
+            <a:r>
+              <a:rPr sz="1500">
+                <a:solidFill>
+                  <a:srgbClr val="22282E"/>
+                </a:solidFill>
+              </a:rPr>
+              <a:t>•  PhotoRec: &lt;https://www.cgsecurity.org/wiki/PhotoRec&gt; — documentación del proyecto sobre recuperación basada en firmas y formatos compatibles.</a:t>
+            </a:r>
+          </a:p>
+          <a:p>
+            <a:pPr>
+              <a:spcAft>
+                <a:spcPts val="600"/>
+              </a:spcAft>
+            </a:pPr>
+            <a:r>
+              <a:rPr sz="1500">
+                <a:solidFill>
+                  <a:srgbClr val="22282E"/>
+                </a:solidFill>
+              </a:rPr>
+              <a:t>•  foremost: &lt;https://foremost.sourceforge.net/&gt; — documentación del carver; sus resultados requieren validación estructural.</a:t>
+            </a:r>
+          </a:p>
+          <a:p>
+            <a:pPr>
+              <a:spcAft>
+                <a:spcPts val="600"/>
+              </a:spcAft>
+            </a:pPr>
+            <a:r>
+              <a:rPr sz="1500">
+                <a:solidFill>
+                  <a:srgbClr val="22282E"/>
+                </a:solidFill>
+              </a:rPr>
+              <a:t>•  bulkextractor: &lt;https://github.com/simsong/bulkextractor&gt; — código y documentación del proyecto para extracción de características sin parsear el filesystem.</a:t>
+            </a:r>
+          </a:p>
+          <a:p>
+            <a:pPr>
+              <a:spcAft>
+                <a:spcPts val="600"/>
+              </a:spcAft>
+            </a:pPr>
+            <a:r>
+              <a:rPr sz="1500">
+                <a:solidFill>
+                  <a:srgbClr val="22282E"/>
+                </a:solidFill>
+              </a:rPr>
+              <a:t>•  NIST CFTT: &lt;https://www.nist.gov/itl/ssd/software-quality-group/computer-forensics-tool-testing-program-cftt&gt; — programa oficial de metodología y pruebas de herramientas forenses; consultar reportes…</a:t>
+            </a:r>
+          </a:p>
+          <a:p>
+            <a:pPr>
+              <a:spcAft>
+                <a:spcPts val="600"/>
+              </a:spcAft>
+            </a:pPr>
+            <a:r>
+              <a:rPr sz="1500">
+                <a:solidFill>
+                  <a:srgbClr val="22282E"/>
+                </a:solidFill>
+              </a:rPr>
+              <a:t>•  Carrier, B. — File System Forensic Analysis, Addison-Wesley, 2005: fundamento conceptual; contrastar detalles con el filesystem y versión actuales.</a:t>
+            </a:r>
+          </a:p>
+        </p:txBody>
+      </p:sp>
+    </p:spTree>
+  </p:cSld>
+  <p:clrMapOvr>
+    <a:masterClrMapping/>
+  </p:clrMapOvr>
+</p:sld>
+</file>
+
+<file path=ppt/slides/slide17.xml><?xml version="1.0" encoding="utf-8"?>
+<p:sld xmlns:a="http://schemas.openxmlformats.org/drawingml/2006/main" xmlns:p="http://schemas.openxmlformats.org/presentationml/2006/main" xmlns:r="http://schemas.openxmlformats.org/officeDocument/2006/relationships">
+  <p:cSld>
+    <p:spTree>
+      <p:nvGrpSpPr>
+        <p:cNvPr id="1" name=""/>
+        <p:cNvGrpSpPr/>
+        <p:nvPr/>
+      </p:nvGrpSpPr>
+      <p:grpSpPr/>
+      <p:sp>
+        <p:nvSpPr>
+          <p:cNvPr id="2" name="TextBox 1"/>
+          <p:cNvSpPr txBox="1"/>
+          <p:nvPr/>
+        </p:nvSpPr>
+        <p:spPr>
+          <a:xfrm>
+            <a:off x="457200" y="274320"/>
+            <a:ext cx="8229600" cy="640080"/>
+          </a:xfrm>
+          <a:prstGeom prst="rect">
+            <a:avLst/>
+          </a:prstGeom>
+          <a:noFill/>
+        </p:spPr>
+        <p:txBody>
+          <a:bodyPr wrap="square">
+            <a:spAutoFit/>
+          </a:bodyPr>
+          <a:lstStyle/>
+          <a:p>
+            <a:r>
+              <a:rPr sz="2200" b="1">
+                <a:solidFill>
+                  <a:srgbClr val="0B3D2E"/>
+                </a:solidFill>
+              </a:rPr>
+              <a:t>Diagrama de la clase</a:t>
+            </a:r>
+          </a:p>
+        </p:txBody>
+      </p:sp>
+      <p:pic>
+        <p:nvPicPr>
+          <p:cNvPr id="3" name="Picture 2" descr="6893968e3d01a896.png"/>
+          <p:cNvPicPr>
+            <a:picLocks noChangeAspect="1"/>
+          </p:cNvPicPr>
+          <p:nvPr/>
+        </p:nvPicPr>
+        <p:blipFill>
+          <a:blip r:embed="rId2"/>
+          <a:stretch>
+            <a:fillRect/>
+          </a:stretch>
+        </p:blipFill>
+        <p:spPr>
+          <a:xfrm>
+            <a:off x="457200" y="3552444"/>
+            <a:ext cx="8229600" cy="393192"/>
+          </a:xfrm>
+          <a:prstGeom prst="rect">
+            <a:avLst/>
+          </a:prstGeom>
+        </p:spPr>
+      </p:pic>
     </p:spTree>
   </p:cSld>
   <p:clrMapOvr>
@@ -3698,7 +4389,7 @@
                   <a:srgbClr val="22282E"/>
                 </a:solidFill>
               </a:rPr>
-              <a:t>•  Aprender a recuperar archivos borrados incluso cuando el sistema de archivos ya no los referencia, mediante file carving: reconstruir archivos a partir de sus firmas (headers/footers) en el espacio no asignado. Al terminar sabrás usar PhotoRec, Scalpel, foremost y bulkextractor para rescatar evidencia perdida.</a:t>
+              <a:t>•  Aprender a recuperar archivos borrados incluso cuando el sistema de archivos ya no los referencia, mediante file carving: reconstruir archivos a partir de sus firmas (headers/footers) en el espacio…</a:t>
             </a:r>
           </a:p>
         </p:txBody>
@@ -4092,7 +4783,7 @@
                   <a:srgbClr val="0B3D2E"/>
                 </a:solidFill>
               </a:rPr>
-              <a:t>📖 Definiciones y características</a:t>
+              <a:t>🧠 Explicación en profundidad</a:t>
             </a:r>
           </a:p>
         </p:txBody>
@@ -4130,97 +4821,97 @@
                   <a:srgbClr val="22282E"/>
                 </a:solidFill>
               </a:rPr>
-              <a:t>•  Recuperación por metadatos: usar el inodo/MFT residual para rescatar el archivo. Característica: rápida y fiable si los punteros sobreviven.</a:t>
-            </a:r>
-          </a:p>
-          <a:p>
-            <a:pPr>
-              <a:spcAft>
-                <a:spcPts val="600"/>
-              </a:spcAft>
-            </a:pPr>
-            <a:r>
-              <a:rPr sz="1500">
-                <a:solidFill>
-                  <a:srgbClr val="22282E"/>
-                </a:solidFill>
-              </a:rPr>
-              <a:t>•  File carving: reconstruir archivos por sus firmas, ignorando el FS. Característica: funciona sin metadatos, pero sufre con la fragmentación.</a:t>
-            </a:r>
-          </a:p>
-          <a:p>
-            <a:pPr>
-              <a:spcAft>
-                <a:spcPts val="600"/>
-              </a:spcAft>
-            </a:pPr>
-            <a:r>
-              <a:rPr sz="1500">
-                <a:solidFill>
-                  <a:srgbClr val="22282E"/>
-                </a:solidFill>
-              </a:rPr>
-              <a:t>•  Magic number / firma: bytes iniciales (y a veces finales) que identifican un formato (FFD8 JPEG, %PDF PDF, PK ZIP). Característica: base del carving.</a:t>
-            </a:r>
-          </a:p>
-          <a:p>
-            <a:pPr>
-              <a:spcAft>
-                <a:spcPts val="600"/>
-              </a:spcAft>
-            </a:pPr>
-            <a:r>
-              <a:rPr sz="1500">
-                <a:solidFill>
-                  <a:srgbClr val="22282E"/>
-                </a:solidFill>
-              </a:rPr>
-              <a:t>•  Header/footer carving: extraer entre una firma de inicio y una de fin. Característica: falla si el archivo está fragmentado.</a:t>
-            </a:r>
-          </a:p>
-          <a:p>
-            <a:pPr>
-              <a:spcAft>
-                <a:spcPts val="600"/>
-              </a:spcAft>
-            </a:pPr>
-            <a:r>
-              <a:rPr sz="1500">
-                <a:solidFill>
-                  <a:srgbClr val="22282E"/>
-                </a:solidFill>
-              </a:rPr>
-              <a:t>•  Fragmentación: archivo disperso en clusters no contiguos. Característica: el carving simple lo reconstruye mal.</a:t>
-            </a:r>
-          </a:p>
-          <a:p>
-            <a:pPr>
-              <a:spcAft>
-                <a:spcPts val="600"/>
-              </a:spcAft>
-            </a:pPr>
-            <a:r>
-              <a:rPr sz="1500">
-                <a:solidFill>
-                  <a:srgbClr val="22282E"/>
-                </a:solidFill>
-              </a:rPr>
-              <a:t>•  bulkextractor: extrae emails, tarjetas, URLs, etc. sin parsear el FS. Característica: veloz y útil para triage.</a:t>
-            </a:r>
-          </a:p>
-          <a:p>
-            <a:pPr>
-              <a:spcAft>
-                <a:spcPts val="600"/>
-              </a:spcAft>
-            </a:pPr>
-            <a:r>
-              <a:rPr sz="1500">
-                <a:solidFill>
-                  <a:srgbClr val="22282E"/>
-                </a:solidFill>
-              </a:rPr>
-              <a:t>•  Falso positivo: dato "recuperado" que no es un archivo válido. Característica: hay que validar cada recuperado.</a:t>
+              <a:t>•  File carving recupera contenido por firmas y estructura sin depender del directorio. Es útil en espacio no asignado o sistemas dañados, pero pierde con frecuencia nombre, ruta y tiempos. Un resultado…</a:t>
+            </a:r>
+          </a:p>
+          <a:p>
+            <a:pPr>
+              <a:spcAft>
+                <a:spcPts val="600"/>
+              </a:spcAft>
+            </a:pPr>
+            <a:r>
+              <a:rPr sz="1500">
+                <a:solidFill>
+                  <a:srgbClr val="22282E"/>
+                </a:solidFill>
+              </a:rPr>
+              <a:t>•  Firmas de cabecera/pie pueden aparecer en datos aleatorios; fragmentación puede truncar o mezclar objetos. Se valida estructura interna y se compara con metadatos residuales, thumbnails, logs o…</a:t>
+            </a:r>
+          </a:p>
+          <a:p>
+            <a:pPr>
+              <a:spcAft>
+                <a:spcPts val="600"/>
+              </a:spcAft>
+            </a:pPr>
+            <a:r>
+              <a:rPr sz="1500">
+                <a:solidFill>
+                  <a:srgbClr val="22282E"/>
+                </a:solidFill>
+              </a:rPr>
+              <a:t>•  Eliminar una entrada suele cambiar metadatos y marcar unidades como disponibles; no describe cuánto contenido permanece ni por cuánto tiempo. Si MFT, inodo o entrada de directorio conserva punteros…</a:t>
+            </a:r>
+          </a:p>
+          <a:p>
+            <a:pPr>
+              <a:spcAft>
+                <a:spcPts val="600"/>
+              </a:spcAft>
+            </a:pPr>
+            <a:r>
+              <a:rPr sz="1500">
+                <a:solidFill>
+                  <a:srgbClr val="22282E"/>
+                </a:solidFill>
+              </a:rPr>
+              <a:t>•  Espacio no asignado, slack, copias de volumen, contenedores y memoria son ámbitos distintos. La herramienta debe registrar exactamente qué rango procesó. Recuperar los mismos bytes desde una shadow…</a:t>
+            </a:r>
+          </a:p>
+          <a:p>
+            <a:pPr>
+              <a:spcAft>
+                <a:spcPts val="600"/>
+              </a:spcAft>
+            </a:pPr>
+            <a:r>
+              <a:rPr sz="1500">
+                <a:solidFill>
+                  <a:srgbClr val="22282E"/>
+                </a:solidFill>
+              </a:rPr>
+              <a:t>•  Los magic numbers son patrones compatibles con un formato, no identificadores únicos. PK aparece en ZIP y en múltiples formatos basados en ZIP; %PDF puede existir dentro de texto o datos comprimidos.…</a:t>
+            </a:r>
+          </a:p>
+          <a:p>
+            <a:pPr>
+              <a:spcAft>
+                <a:spcPts val="600"/>
+              </a:spcAft>
+            </a:pPr>
+            <a:r>
+              <a:rPr sz="1500">
+                <a:solidFill>
+                  <a:srgbClr val="22282E"/>
+                </a:solidFill>
+              </a:rPr>
+              <a:t>•  La validación combina parser específico, estructura interna, tamaño coherente, apertura segura, hash y comparación con metadatos residuales. En imágenes se verifican marcadores y dimensiones; en PDF…</a:t>
+            </a:r>
+          </a:p>
+          <a:p>
+            <a:pPr>
+              <a:spcAft>
+                <a:spcPts val="600"/>
+              </a:spcAft>
+            </a:pPr>
+            <a:r>
+              <a:rPr sz="1500">
+                <a:solidFill>
+                  <a:srgbClr val="22282E"/>
+                </a:solidFill>
+              </a:rPr>
+              <a:t>•  Cada objeto recuperado lleva hash, offset inicial y final, fuente, herramienta, configuración y mensajes de error. bulkextractor busca características como correos o URLs sin depender del filesystem…</a:t>
             </a:r>
           </a:p>
         </p:txBody>
@@ -4271,7 +4962,7 @@
                   <a:srgbClr val="0B3D2E"/>
                 </a:solidFill>
               </a:rPr>
-              <a:t>🧰 Herramientas y preparación</a:t>
+              <a:t>📔 Glosario</a:t>
             </a:r>
           </a:p>
         </p:txBody>
@@ -4309,52 +5000,97 @@
                   <a:srgbClr val="22282E"/>
                 </a:solidFill>
               </a:rPr>
-              <a:t>•  Carving: photorec, foremost, scalpel.</a:t>
-            </a:r>
-          </a:p>
-          <a:p>
-            <a:pPr>
-              <a:spcAft>
-                <a:spcPts val="600"/>
-              </a:spcAft>
-            </a:pPr>
-            <a:r>
-              <a:rPr sz="1500">
-                <a:solidFill>
-                  <a:srgbClr val="22282E"/>
-                </a:solidFill>
-              </a:rPr>
-              <a:t>•  Triage: bulkextractor.</a:t>
-            </a:r>
-          </a:p>
-          <a:p>
-            <a:pPr>
-              <a:spcAft>
-                <a:spcPts val="600"/>
-              </a:spcAft>
-            </a:pPr>
-            <a:r>
-              <a:rPr sz="1500">
-                <a:solidFill>
-                  <a:srgbClr val="22282E"/>
-                </a:solidFill>
-              </a:rPr>
-              <a:t>•  Metadatos: The Sleuth Kit (icat, fls -d), extundelete (ext4), testdisk (particiones).</a:t>
-            </a:r>
-          </a:p>
-          <a:p>
-            <a:pPr>
-              <a:spcAft>
-                <a:spcPts val="600"/>
-              </a:spcAft>
-            </a:pPr>
-            <a:r>
-              <a:rPr sz="1500">
-                <a:solidFill>
-                  <a:srgbClr val="22282E"/>
-                </a:solidFill>
-              </a:rPr>
-              <a:t>•  Entrada: una imagen .dd propia donde borraste archivos a propósito.</a:t>
+              <a:t>•  Carving: recuperación basada en contenido.</a:t>
+            </a:r>
+          </a:p>
+          <a:p>
+            <a:pPr>
+              <a:spcAft>
+                <a:spcPts val="600"/>
+              </a:spcAft>
+            </a:pPr>
+            <a:r>
+              <a:rPr sz="1500">
+                <a:solidFill>
+                  <a:srgbClr val="22282E"/>
+                </a:solidFill>
+              </a:rPr>
+              <a:t>•  File signature: patrón que identifica un formato.</a:t>
+            </a:r>
+          </a:p>
+          <a:p>
+            <a:pPr>
+              <a:spcAft>
+                <a:spcPts val="600"/>
+              </a:spcAft>
+            </a:pPr>
+            <a:r>
+              <a:rPr sz="1500">
+                <a:solidFill>
+                  <a:srgbClr val="22282E"/>
+                </a:solidFill>
+              </a:rPr>
+              <a:t>•  Offset: posición de bytes dentro de la imagen.</a:t>
+            </a:r>
+          </a:p>
+          <a:p>
+            <a:pPr>
+              <a:spcAft>
+                <a:spcPts val="600"/>
+              </a:spcAft>
+            </a:pPr>
+            <a:r>
+              <a:rPr sz="1500">
+                <a:solidFill>
+                  <a:srgbClr val="22282E"/>
+                </a:solidFill>
+              </a:rPr>
+              <a:t>•  Fragmentación: bloques de un archivo no contiguos.</a:t>
+            </a:r>
+          </a:p>
+          <a:p>
+            <a:pPr>
+              <a:spcAft>
+                <a:spcPts val="600"/>
+              </a:spcAft>
+            </a:pPr>
+            <a:r>
+              <a:rPr sz="1500">
+                <a:solidFill>
+                  <a:srgbClr val="22282E"/>
+                </a:solidFill>
+              </a:rPr>
+              <a:t>•  False carving: candidato que imita firmas sin ser objeto válido.</a:t>
+            </a:r>
+          </a:p>
+          <a:p>
+            <a:pPr>
+              <a:spcAft>
+                <a:spcPts val="600"/>
+              </a:spcAft>
+            </a:pPr>
+            <a:r>
+              <a:rPr sz="1500">
+                <a:solidFill>
+                  <a:srgbClr val="22282E"/>
+                </a:solidFill>
+              </a:rPr>
+              <a:t>•  TRIM: indicación de bloques liberados a un SSD.</a:t>
+            </a:r>
+          </a:p>
+          <a:p>
+            <a:pPr>
+              <a:spcAft>
+                <a:spcPts val="600"/>
+              </a:spcAft>
+            </a:pPr>
+            <a:r>
+              <a:rPr sz="1500">
+                <a:solidFill>
+                  <a:srgbClr val="22282E"/>
+                </a:solidFill>
+              </a:rPr>
+              <a:t>•  Deduplicación: agrupación de contenido idéntico.</a:t>
             </a:r>
           </a:p>
         </p:txBody>
@@ -4405,7 +5141,7 @@
                   <a:srgbClr val="0B3D2E"/>
                 </a:solidFill>
               </a:rPr>
-              <a:t>🧪 Laboratorio guiado</a:t>
+              <a:t>📖 Definiciones y características</a:t>
             </a:r>
           </a:p>
         </p:txBody>
@@ -4443,97 +5179,97 @@
                   <a:srgbClr val="22282E"/>
                 </a:solidFill>
               </a:rPr>
-              <a:t>•  Primero intenta recuperación por metadatos con TSK:</a:t>
-            </a:r>
-          </a:p>
-          <a:p>
-            <a:pPr>
-              <a:spcAft>
-                <a:spcPts val="600"/>
-              </a:spcAft>
-            </a:pPr>
-            <a:r>
-              <a:rPr sz="1500">
-                <a:solidFill>
-                  <a:srgbClr val="22282E"/>
-                </a:solidFill>
-              </a:rPr>
-              <a:t>•  fls -d -r -o 2048 imagen.dd        # lista borrados</a:t>
-            </a:r>
-          </a:p>
-          <a:p>
-            <a:pPr>
-              <a:spcAft>
-                <a:spcPts val="600"/>
-              </a:spcAft>
-            </a:pPr>
-            <a:r>
-              <a:rPr sz="1500">
-                <a:solidFill>
-                  <a:srgbClr val="22282E"/>
-                </a:solidFill>
-              </a:rPr>
-              <a:t>•  icat -o 2048 imagen.dd 512 &gt; recuperadometa.bin</a:t>
-            </a:r>
-          </a:p>
-          <a:p>
-            <a:pPr>
-              <a:spcAft>
-                <a:spcPts val="600"/>
-              </a:spcAft>
-            </a:pPr>
-            <a:r>
-              <a:rPr sz="1500">
-                <a:solidFill>
-                  <a:srgbClr val="22282E"/>
-                </a:solidFill>
-              </a:rPr>
-              <a:t>•  Si no hay metadatos, aplica carving con foremost:</a:t>
-            </a:r>
-          </a:p>
-          <a:p>
-            <a:pPr>
-              <a:spcAft>
-                <a:spcPts val="600"/>
-              </a:spcAft>
-            </a:pPr>
-            <a:r>
-              <a:rPr sz="1500">
-                <a:solidFill>
-                  <a:srgbClr val="22282E"/>
-                </a:solidFill>
-              </a:rPr>
-              <a:t>•  foremost -t jpg,pdf,doc,zip -i imagen.dd -o salidaforemost</a:t>
-            </a:r>
-          </a:p>
-          <a:p>
-            <a:pPr>
-              <a:spcAft>
-                <a:spcPts val="600"/>
-              </a:spcAft>
-            </a:pPr>
-            <a:r>
-              <a:rPr sz="1500">
-                <a:solidFill>
-                  <a:srgbClr val="22282E"/>
-                </a:solidFill>
-              </a:rPr>
-              <a:t>•  Prueba PhotoRec (interactivo, muy potente para imágenes):</a:t>
-            </a:r>
-          </a:p>
-          <a:p>
-            <a:pPr>
-              <a:spcAft>
-                <a:spcPts val="600"/>
-              </a:spcAft>
-            </a:pPr>
-            <a:r>
-              <a:rPr sz="1500">
-                <a:solidFill>
-                  <a:srgbClr val="22282E"/>
-                </a:solidFill>
-              </a:rPr>
-              <a:t>•  photorec imagen.dd</a:t>
+              <a:t>•  Recuperación por metadatos: usar estructuras residuales del filesystem para localizar contenido. Característica: puede conservar más contexto si punteros y unidades no fueron reutilizados.</a:t>
+            </a:r>
+          </a:p>
+          <a:p>
+            <a:pPr>
+              <a:spcAft>
+                <a:spcPts val="600"/>
+              </a:spcAft>
+            </a:pPr>
+            <a:r>
+              <a:rPr sz="1500">
+                <a:solidFill>
+                  <a:srgbClr val="22282E"/>
+                </a:solidFill>
+              </a:rPr>
+              <a:t>•  File carving: reconstruir archivos por sus firmas, ignorando el FS. Característica: funciona sin metadatos, pero sufre con la fragmentación.</a:t>
+            </a:r>
+          </a:p>
+          <a:p>
+            <a:pPr>
+              <a:spcAft>
+                <a:spcPts val="600"/>
+              </a:spcAft>
+            </a:pPr>
+            <a:r>
+              <a:rPr sz="1500">
+                <a:solidFill>
+                  <a:srgbClr val="22282E"/>
+                </a:solidFill>
+              </a:rPr>
+              <a:t>•  Magic number / firma: patrón de bytes compatible con uno o más formatos (FFD8 JPEG, %PDF PDF, PK ZIP y derivados). Característica: inicia la detección, pero exige validación estructural.</a:t>
+            </a:r>
+          </a:p>
+          <a:p>
+            <a:pPr>
+              <a:spcAft>
+                <a:spcPts val="600"/>
+              </a:spcAft>
+            </a:pPr>
+            <a:r>
+              <a:rPr sz="1500">
+                <a:solidFill>
+                  <a:srgbClr val="22282E"/>
+                </a:solidFill>
+              </a:rPr>
+              <a:t>•  Header/footer carving: extraer entre una firma de inicio y una de fin. Característica: falla si el archivo está fragmentado.</a:t>
+            </a:r>
+          </a:p>
+          <a:p>
+            <a:pPr>
+              <a:spcAft>
+                <a:spcPts val="600"/>
+              </a:spcAft>
+            </a:pPr>
+            <a:r>
+              <a:rPr sz="1500">
+                <a:solidFill>
+                  <a:srgbClr val="22282E"/>
+                </a:solidFill>
+              </a:rPr>
+              <a:t>•  Fragmentación: archivo disperso en clusters no contiguos. Característica: el carving simple lo reconstruye mal.</a:t>
+            </a:r>
+          </a:p>
+          <a:p>
+            <a:pPr>
+              <a:spcAft>
+                <a:spcPts val="600"/>
+              </a:spcAft>
+            </a:pPr>
+            <a:r>
+              <a:rPr sz="1500">
+                <a:solidFill>
+                  <a:srgbClr val="22282E"/>
+                </a:solidFill>
+              </a:rPr>
+              <a:t>•  bulkextractor: busca características como correos y URLs sin depender del filesystem. Característica: útil para triage; sus hallazgos necesitan contexto y deduplicación.</a:t>
+            </a:r>
+          </a:p>
+          <a:p>
+            <a:pPr>
+              <a:spcAft>
+                <a:spcPts val="600"/>
+              </a:spcAft>
+            </a:pPr>
+            <a:r>
+              <a:rPr sz="1500">
+                <a:solidFill>
+                  <a:srgbClr val="22282E"/>
+                </a:solidFill>
+              </a:rPr>
+              <a:t>•  Falso positivo: dato "recuperado" que no es un archivo válido. Característica: hay que validar cada recuperado.</a:t>
             </a:r>
           </a:p>
         </p:txBody>
@@ -4584,7 +5320,7 @@
                   <a:srgbClr val="0B3D2E"/>
                 </a:solidFill>
               </a:rPr>
-              <a:t>✍️ Ejercicios</a:t>
+              <a:t>🔍 Caso razonado — dos JPEG y un PDF parcialmente sobrescrito</a:t>
             </a:r>
           </a:p>
         </p:txBody>
@@ -4622,82 +5358,22 @@
                   <a:srgbClr val="22282E"/>
                 </a:solidFill>
               </a:rPr>
-              <a:t>•  Explica cuándo prefieres metadatos y cuándo carving.</a:t>
-            </a:r>
-          </a:p>
-          <a:p>
-            <a:pPr>
-              <a:spcAft>
-                <a:spcPts val="600"/>
-              </a:spcAft>
-            </a:pPr>
-            <a:r>
-              <a:rPr sz="1500">
-                <a:solidFill>
-                  <a:srgbClr val="22282E"/>
-                </a:solidFill>
-              </a:rPr>
-              <a:t>•  Identifica las firmas de JPEG, PDF y ZIP en un editor hex.</a:t>
-            </a:r>
-          </a:p>
-          <a:p>
-            <a:pPr>
-              <a:spcAft>
-                <a:spcPts val="600"/>
-              </a:spcAft>
-            </a:pPr>
-            <a:r>
-              <a:rPr sz="1500">
-                <a:solidFill>
-                  <a:srgbClr val="22282E"/>
-                </a:solidFill>
-              </a:rPr>
-              <a:t>•  Recupera imágenes borradas propias con PhotoRec y valídalas.</a:t>
-            </a:r>
-          </a:p>
-          <a:p>
-            <a:pPr>
-              <a:spcAft>
-                <a:spcPts val="600"/>
-              </a:spcAft>
-            </a:pPr>
-            <a:r>
-              <a:rPr sz="1500">
-                <a:solidFill>
-                  <a:srgbClr val="22282E"/>
-                </a:solidFill>
-              </a:rPr>
-              <a:t>•  Compara los resultados de foremost y Scalpel sobre la misma imagen.</a:t>
-            </a:r>
-          </a:p>
-          <a:p>
-            <a:pPr>
-              <a:spcAft>
-                <a:spcPts val="600"/>
-              </a:spcAft>
-            </a:pPr>
-            <a:r>
-              <a:rPr sz="1500">
-                <a:solidFill>
-                  <a:srgbClr val="22282E"/>
-                </a:solidFill>
-              </a:rPr>
-              <a:t>•  Extrae correos y URLs con bulkextractor.</a:t>
-            </a:r>
-          </a:p>
-          <a:p>
-            <a:pPr>
-              <a:spcAft>
-                <a:spcPts val="600"/>
-              </a:spcAft>
-            </a:pPr>
-            <a:r>
-              <a:rPr sz="1500">
-                <a:solidFill>
-                  <a:srgbClr val="22282E"/>
-                </a:solidFill>
-              </a:rPr>
-              <a:t>•  Explica por qué la fragmentación arruina el carving simple.</a:t>
+              <a:t>•  En una imagen, la recuperación por MFT rescata un JPEG con nombre y clusters; PhotoRec recupera el mismo contenido y otro JPEG desde espacio no asignado. Los hashes revelan que el primero es…</a:t>
+            </a:r>
+          </a:p>
+          <a:p>
+            <a:pPr>
+              <a:spcAft>
+                <a:spcPts val="600"/>
+              </a:spcAft>
+            </a:pPr>
+            <a:r>
+              <a:rPr sz="1500">
+                <a:solidFill>
+                  <a:srgbClr val="22282E"/>
+                </a:solidFill>
+              </a:rPr>
+              <a:t>•  Un candidato PDF comienza con %PDF pero su tabla xref apunta a sectores sobrescritos. El visor muestra una página, aunque el parser reporta objetos faltantes. El informe lo clasifica como…</a:t>
             </a:r>
           </a:p>
         </p:txBody>
@@ -4748,7 +5424,7 @@
                   <a:srgbClr val="0B3D2E"/>
                 </a:solidFill>
               </a:rPr>
-              <a:t>📝 Reto verificable</a:t>
+              <a:t>✅ Criterio de dominio</a:t>
             </a:r>
           </a:p>
         </p:txBody>
@@ -4786,22 +5462,7 @@
                   <a:srgbClr val="22282E"/>
                 </a:solidFill>
               </a:rPr>
-              <a:t>•  Borra cinco archivos conocidos (de tipos distintos) de una imagen propia, recupéralos por carving y demuestra —comparando hashes— cuáles se recuperaron íntegros y cuáles no, explicando la causa.</a:t>
-            </a:r>
-          </a:p>
-          <a:p>
-            <a:pPr>
-              <a:spcAft>
-                <a:spcPts val="600"/>
-              </a:spcAft>
-            </a:pPr>
-            <a:r>
-              <a:rPr sz="1500">
-                <a:solidFill>
-                  <a:srgbClr val="22282E"/>
-                </a:solidFill>
-              </a:rPr>
-              <a:t>•  Criterio de aceptación: entregas los archivos recuperados, una tabla con hash original vs. hash recuperado por cada uno, y una explicación de por qué los que fallaron no coincidieron (fragmentación, sobrescritura o formato).</a:t>
+              <a:t>•  Dominas la clase cuando eliges recuperación por metadatos antes de carving cuando corresponde, delimitas el espacio procesado, registras offsets y parámetros, validas cada formato con estructura…</a:t>
             </a:r>
           </a:p>
         </p:txBody>
